--- a/Nhom8_TH_4/Nhom8_TH_4_Phan2.1.pptx
+++ b/Nhom8_TH_4/Nhom8_TH_4_Phan2.1.pptx
@@ -1157,7 +1157,12 @@
             <p:ph type="title"/>
           </p:nvPr>
         </p:nvSpPr>
-        <p:spPr/>
+        <p:spPr>
+          <a:xfrm>
+            <a:off x="838199" y="636059"/>
+            <a:ext cx="10888133" cy="1325563"/>
+          </a:xfrm>
+        </p:spPr>
         <p:txBody>
           <a:bodyPr>
             <a:normAutofit/>
@@ -1191,6 +1196,10 @@
           </p:nvPr>
         </p:nvSpPr>
         <p:spPr>
+          <a:xfrm>
+            <a:off x="838200" y="2096559"/>
+            <a:ext cx="10515600" cy="4351338"/>
+          </a:xfrm>
           <a:noFill/>
         </p:spPr>
         <p:txBody>
@@ -4548,13 +4557,13 @@
           <p:nvPr>
             <p:extLst>
               <p:ext uri="{D42A27DB-BD31-4B8C-83A1-F6EECF244321}">
-                <p14:modId xmlns:p14="http://schemas.microsoft.com/office/powerpoint/2010/main" val="2250264982"/>
+                <p14:modId xmlns:p14="http://schemas.microsoft.com/office/powerpoint/2010/main" val="1673154305"/>
               </p:ext>
             </p:extLst>
           </p:nvPr>
         </p:nvGraphicFramePr>
         <p:xfrm>
-          <a:off x="1938867" y="2607732"/>
+          <a:off x="1938867" y="2739497"/>
           <a:ext cx="8559800" cy="3708400"/>
         </p:xfrm>
         <a:graphic>
